--- a/public/fun/pack/pptx/reviewpro/보장점검양식프리미엄_01_본인점검_아이보리로즈골드.pptx
+++ b/public/fun/pack/pptx/reviewpro/보장점검양식프리미엄_01_본인점검_아이보리로즈골드.pptx
@@ -112,12 +112,12 @@
   <p:extLst>
     <p:ext uri="{521415D9-36F7-43E2-AB2F-B90AF26B5E84}">
       <p14:sectionLst xmlns:p14="http://schemas.microsoft.com/office/powerpoint/2010/main">
-        <p14:section name="시작" id="{491FAD1A-4552-494C-99AA-ECB86C963AF8}">
+        <p14:section name="시작" id="{D1998DA1-BCE0-4079-A28C-685DB5B34655}">
           <p14:sldIdLst>
             <p14:sldId id="256"/>
           </p14:sldIdLst>
         </p14:section>
-        <p14:section name="본문" id="{D72495DE-551E-471B-9D61-956932B3A8C7}">
+        <p14:section name="본문" id="{2AEB7881-E461-4EC3-8E02-478896AA9902}">
           <p14:sldIdLst>
             <p14:sldId id="257"/>
             <p14:sldId id="258"/>
@@ -1538,7 +1538,7 @@
             </a:lvl1pPr>
           </a:lstStyle>
           <a:p>
-            <a:fld id="{54914485-3977-486B-A4D6-42D8AC4FE284}" type="slidenum">
+            <a:fld id="{8C2E90C2-9943-4C07-A097-41DE99C4D020}" type="slidenum">
               <a:rPr lang="en-US"/>
               <a:t>‹#›</a:t>
             </a:fld>
@@ -2519,7 +2519,7 @@
             </a:lvl1pPr>
           </a:lstStyle>
           <a:p>
-            <a:fld id="{7DADAEB3-A3B6-4412-A9CE-4625CA10DA71}" type="slidenum">
+            <a:fld id="{72B511B6-7D09-4946-B9A8-FB8CDDD9EEDB}" type="slidenum">
               <a:rPr lang="en-US"/>
               <a:t>‹#›</a:t>
             </a:fld>
@@ -3529,7 +3529,7 @@
             </a:lvl1pPr>
           </a:lstStyle>
           <a:p>
-            <a:fld id="{B3007FB6-CE01-4628-9A97-E5D2CF89A53F}" type="slidenum">
+            <a:fld id="{391578BF-EFF4-4289-BEB8-E22B43FD5915}" type="slidenum">
               <a:rPr lang="en-US"/>
               <a:t>‹#›</a:t>
             </a:fld>
@@ -4692,7 +4692,7 @@
           <a:p>
             <a:r>
               <a:rPr lang="ko-KR"/>
-              <a:t>본인 점검 · 0000. 00. 00</a:t>
+              <a:t>본인 점검 · 날짜 입력</a:t>
             </a:r>
           </a:p>
           <a:p>
@@ -4783,7 +4783,7 @@
           <a:bodyPr/>
           <a:lstStyle/>
           <a:p>
-            <a:fld id="{E5B5E5D6-76A2-493C-83EE-706E2C6040F2}" type="slidenum">
+            <a:fld id="{3B4133AB-C397-406C-9D26-6BAB8F750355}" type="slidenum">
               <a:rPr lang="en-US"/>
               <a:t>‹#›</a:t>
             </a:fld>
@@ -5299,7 +5299,7 @@
           <a:bodyPr/>
           <a:lstStyle/>
           <a:p>
-            <a:fld id="{A661276F-14F5-43AF-91C9-376CF8BE283A}" type="slidenum">
+            <a:fld id="{B83A2E2B-1BDF-4B15-B753-177131512472}" type="slidenum">
               <a:rPr lang="en-US"/>
               <a:t>‹#›</a:t>
             </a:fld>
@@ -6805,7 +6805,7 @@
           <a:bodyPr/>
           <a:lstStyle/>
           <a:p>
-            <a:fld id="{9EBF7B56-19B3-4237-A4CF-8835FD9F2E6E}" type="slidenum">
+            <a:fld id="{D8AAD287-43A9-4798-81DC-788FD541B4D2}" type="slidenum">
               <a:rPr lang="en-US"/>
               <a:t>‹#›</a:t>
             </a:fld>
@@ -8355,7 +8355,7 @@
           <a:bodyPr/>
           <a:lstStyle/>
           <a:p>
-            <a:fld id="{560D2D17-BB94-4ED7-A02F-721C51AA5CF7}" type="slidenum">
+            <a:fld id="{CFE7DF0D-ADBB-4E61-B9E5-E4FD8F224717}" type="slidenum">
               <a:rPr lang="en-US"/>
               <a:t>‹#›</a:t>
             </a:fld>
@@ -9226,7 +9226,7 @@
           <a:bodyPr/>
           <a:lstStyle/>
           <a:p>
-            <a:fld id="{45220A97-0D1A-4462-A4EC-9A2991205BD2}" type="slidenum">
+            <a:fld id="{589ED36E-3313-4FE6-BA44-3CC67D9313F0}" type="slidenum">
               <a:rPr lang="en-US"/>
               <a:t>‹#›</a:t>
             </a:fld>
